--- a/public/projects/architecture-three-ways/slides/01-layers/exec.pptx
+++ b/public/projects/architecture-three-ways/slides/01-layers/exec.pptx
@@ -857,7 +857,7 @@
     <p:bg>
       <p:bgPr>
         <a:solidFill>
-          <a:srgbClr val="E2EBF4"/>
+          <a:srgbClr val="FFFFFF"/>
         </a:solidFill>
       </p:bgPr>
     </p:bg>
@@ -877,14 +877,14 @@
       </p:grpSpPr>
       <p:sp>
         <p:nvSpPr>
-          <p:cNvPr id="2" name="Text 0"/>
-          <p:cNvSpPr/>
-          <p:nvPr/>
-        </p:nvSpPr>
-        <p:spPr>
-          <a:xfrm>
-            <a:off x="457200" y="2194560"/>
-            <a:ext cx="11274552" cy="1280160"/>
+          <p:cNvPr id="2" name="Eyebrow"/>
+          <p:cNvSpPr/>
+          <p:nvPr/>
+        </p:nvSpPr>
+        <p:spPr>
+          <a:xfrm>
+            <a:off x="457200" y="457200"/>
+            <a:ext cx="11274552" cy="237744"/>
           </a:xfrm>
           <a:prstGeom prst="rect">
             <a:avLst/>
@@ -893,37 +893,594 @@
           <a:ln/>
         </p:spPr>
         <p:txBody>
-          <a:bodyPr wrap="square" rtlCol="0" anchor="ctr"/>
+          <a:bodyPr wrap="square" lIns="0" tIns="0" rIns="0" bIns="0" rtlCol="0" anchor="t"/>
+          <a:lstStyle/>
+          <a:p>
+            <a:pPr algn="l" indent="0" marL="0">
+              <a:buNone/>
+            </a:pPr>
+            <a:r>
+              <a:rPr lang="en-US" sz="1300" b="1" dirty="0">
+                <a:solidFill>
+                  <a:srgbClr val="2F5D8A"/>
+                </a:solidFill>
+                <a:latin typeface="Arial" pitchFamily="34" charset="0"/>
+                <a:ea typeface="Arial" pitchFamily="34" charset="-122"/>
+                <a:cs typeface="Arial" pitchFamily="34" charset="-120"/>
+              </a:rPr>
+              <a:t>NASA’s core Flight System (cFS) architecture</a:t>
+            </a:r>
+            <a:endParaRPr lang="en-US" sz="1300" dirty="0"/>
+          </a:p>
+        </p:txBody>
+      </p:sp>
+      <p:sp>
+        <p:nvSpPr>
+          <p:cNvPr id="3" name="Title"/>
+          <p:cNvSpPr/>
+          <p:nvPr/>
+        </p:nvSpPr>
+        <p:spPr>
+          <a:xfrm>
+            <a:off x="457200" y="731520"/>
+            <a:ext cx="11274552" cy="932688"/>
+          </a:xfrm>
+          <a:prstGeom prst="rect">
+            <a:avLst/>
+          </a:prstGeom>
+          <a:noFill/>
+          <a:ln/>
+        </p:spPr>
+        <p:txBody>
+          <a:bodyPr wrap="square" lIns="0" tIns="0" rIns="0" bIns="0" rtlCol="0" anchor="t"/>
+          <a:lstStyle/>
+          <a:p>
+            <a:pPr algn="l" indent="0" marL="0">
+              <a:lnSpc>
+                <a:spcPct val="95000"/>
+              </a:lnSpc>
+              <a:buNone/>
+            </a:pPr>
+            <a:r>
+              <a:rPr lang="en-US" sz="3000" b="1" dirty="0">
+                <a:solidFill>
+                  <a:srgbClr val="1F2328"/>
+                </a:solidFill>
+                <a:latin typeface="Arial" pitchFamily="34" charset="0"/>
+                <a:ea typeface="Arial" pitchFamily="34" charset="-122"/>
+                <a:cs typeface="Arial" pitchFamily="34" charset="-120"/>
+              </a:rPr>
+              <a:t>Each layer hides its implementation behind a standard API, so a mission reuses the framework and focuses on custom parts</a:t>
+            </a:r>
+            <a:endParaRPr lang="en-US" sz="3000" dirty="0"/>
+          </a:p>
+        </p:txBody>
+      </p:sp>
+      <p:sp>
+        <p:nvSpPr>
+          <p:cNvPr id="4" name="Legend swatch 1"/>
+          <p:cNvSpPr/>
+          <p:nvPr/>
+        </p:nvSpPr>
+        <p:spPr>
+          <a:xfrm>
+            <a:off x="457200" y="1901952"/>
+            <a:ext cx="274320" cy="155448"/>
+          </a:xfrm>
+          <a:prstGeom prst="rect">
+            <a:avLst/>
+          </a:prstGeom>
+          <a:solidFill>
+            <a:srgbClr val="DCE6F0"/>
+          </a:solidFill>
+          <a:ln w="12700">
+            <a:solidFill>
+              <a:srgbClr val="2F5D8A"/>
+            </a:solidFill>
+            <a:prstDash val="solid"/>
+          </a:ln>
+        </p:spPr>
+      </p:sp>
+      <p:sp>
+        <p:nvSpPr>
+          <p:cNvPr id="5" name="Legend 1"/>
+          <p:cNvSpPr/>
+          <p:nvPr/>
+        </p:nvSpPr>
+        <p:spPr>
+          <a:xfrm>
+            <a:off x="804672" y="1865376"/>
+            <a:ext cx="1885798" cy="219456"/>
+          </a:xfrm>
+          <a:prstGeom prst="rect">
+            <a:avLst/>
+          </a:prstGeom>
+          <a:noFill/>
+          <a:ln/>
+        </p:spPr>
+        <p:txBody>
+          <a:bodyPr wrap="square" lIns="0" tIns="0" rIns="0" bIns="0" rtlCol="0" anchor="ctr"/>
+          <a:lstStyle/>
+          <a:p>
+            <a:pPr algn="l" indent="0" marL="0">
+              <a:buNone/>
+            </a:pPr>
+            <a:r>
+              <a:rPr lang="en-US" sz="1200" dirty="0">
+                <a:solidFill>
+                  <a:srgbClr val="1F2328"/>
+                </a:solidFill>
+                <a:latin typeface="Arial" pitchFamily="34" charset="0"/>
+                <a:ea typeface="Arial" pitchFamily="34" charset="-122"/>
+                <a:cs typeface="Arial" pitchFamily="34" charset="-120"/>
+              </a:rPr>
+              <a:t>Reused, NASA maintained</a:t>
+            </a:r>
+            <a:endParaRPr lang="en-US" sz="1200" dirty="0"/>
+          </a:p>
+        </p:txBody>
+      </p:sp>
+      <p:sp>
+        <p:nvSpPr>
+          <p:cNvPr id="6" name="Legend swatch 2"/>
+          <p:cNvSpPr/>
+          <p:nvPr/>
+        </p:nvSpPr>
+        <p:spPr>
+          <a:xfrm>
+            <a:off x="2964790" y="1901952"/>
+            <a:ext cx="274320" cy="155448"/>
+          </a:xfrm>
+          <a:prstGeom prst="rect">
+            <a:avLst/>
+          </a:prstGeom>
+          <a:solidFill>
+            <a:srgbClr val="FBE4D2"/>
+          </a:solidFill>
+          <a:ln w="12700">
+            <a:solidFill>
+              <a:srgbClr val="B85F1E"/>
+            </a:solidFill>
+            <a:prstDash val="solid"/>
+          </a:ln>
+        </p:spPr>
+      </p:sp>
+      <p:sp>
+        <p:nvSpPr>
+          <p:cNvPr id="7" name="Legend 2"/>
+          <p:cNvSpPr/>
+          <p:nvPr/>
+        </p:nvSpPr>
+        <p:spPr>
+          <a:xfrm>
+            <a:off x="3312262" y="1865376"/>
+            <a:ext cx="1385926" cy="219456"/>
+          </a:xfrm>
+          <a:prstGeom prst="rect">
+            <a:avLst/>
+          </a:prstGeom>
+          <a:noFill/>
+          <a:ln/>
+        </p:spPr>
+        <p:txBody>
+          <a:bodyPr wrap="square" lIns="0" tIns="0" rIns="0" bIns="0" rtlCol="0" anchor="ctr"/>
+          <a:lstStyle/>
+          <a:p>
+            <a:pPr algn="l" indent="0" marL="0">
+              <a:buNone/>
+            </a:pPr>
+            <a:r>
+              <a:rPr lang="en-US" sz="1200" dirty="0">
+                <a:solidFill>
+                  <a:srgbClr val="1F2328"/>
+                </a:solidFill>
+                <a:latin typeface="Arial" pitchFamily="34" charset="0"/>
+                <a:ea typeface="Arial" pitchFamily="34" charset="-122"/>
+                <a:cs typeface="Arial" pitchFamily="34" charset="-120"/>
+              </a:rPr>
+              <a:t>Built by the mission</a:t>
+            </a:r>
+            <a:endParaRPr lang="en-US" sz="1200" dirty="0"/>
+          </a:p>
+        </p:txBody>
+      </p:sp>
+      <p:sp>
+        <p:nvSpPr>
+          <p:cNvPr id="8" name="Legend swatch 3"/>
+          <p:cNvSpPr/>
+          <p:nvPr/>
+        </p:nvSpPr>
+        <p:spPr>
+          <a:xfrm>
+            <a:off x="4972507" y="1901952"/>
+            <a:ext cx="274320" cy="155448"/>
+          </a:xfrm>
+          <a:prstGeom prst="rect">
+            <a:avLst/>
+          </a:prstGeom>
+          <a:solidFill>
+            <a:srgbClr val="E4E7EB"/>
+          </a:solidFill>
+          <a:ln w="12700">
+            <a:solidFill>
+              <a:srgbClr val="7C8591"/>
+            </a:solidFill>
+            <a:prstDash val="solid"/>
+          </a:ln>
+        </p:spPr>
+      </p:sp>
+      <p:sp>
+        <p:nvSpPr>
+          <p:cNvPr id="9" name="Legend 3"/>
+          <p:cNvSpPr/>
+          <p:nvPr/>
+        </p:nvSpPr>
+        <p:spPr>
+          <a:xfrm>
+            <a:off x="5319979" y="1865376"/>
+            <a:ext cx="801472" cy="219456"/>
+          </a:xfrm>
+          <a:prstGeom prst="rect">
+            <a:avLst/>
+          </a:prstGeom>
+          <a:noFill/>
+          <a:ln/>
+        </p:spPr>
+        <p:txBody>
+          <a:bodyPr wrap="square" lIns="0" tIns="0" rIns="0" bIns="0" rtlCol="0" anchor="ctr"/>
+          <a:lstStyle/>
+          <a:p>
+            <a:pPr algn="l" indent="0" marL="0">
+              <a:buNone/>
+            </a:pPr>
+            <a:r>
+              <a:rPr lang="en-US" sz="1200" dirty="0">
+                <a:solidFill>
+                  <a:srgbClr val="1F2328"/>
+                </a:solidFill>
+                <a:latin typeface="Arial" pitchFamily="34" charset="0"/>
+                <a:ea typeface="Arial" pitchFamily="34" charset="-122"/>
+                <a:cs typeface="Arial" pitchFamily="34" charset="-120"/>
+              </a:rPr>
+              <a:t>Third party</a:t>
+            </a:r>
+            <a:endParaRPr lang="en-US" sz="1200" dirty="0"/>
+          </a:p>
+        </p:txBody>
+      </p:sp>
+      <p:sp>
+        <p:nvSpPr>
+          <p:cNvPr id="10" name="Layer 1 fill"/>
+          <p:cNvSpPr/>
+          <p:nvPr/>
+        </p:nvSpPr>
+        <p:spPr>
+          <a:xfrm>
+            <a:off x="457200" y="2176272"/>
+            <a:ext cx="3072384" cy="786384"/>
+          </a:xfrm>
+          <a:prstGeom prst="rect">
+            <a:avLst/>
+          </a:prstGeom>
+          <a:solidFill>
+            <a:srgbClr val="DCE6F0"/>
+          </a:solidFill>
+          <a:ln/>
+        </p:spPr>
+      </p:sp>
+      <p:sp>
+        <p:nvSpPr>
+          <p:cNvPr id="11" name="Layer 1 edge"/>
+          <p:cNvSpPr/>
+          <p:nvPr/>
+        </p:nvSpPr>
+        <p:spPr>
+          <a:xfrm>
+            <a:off x="457200" y="2176272"/>
+            <a:ext cx="91440" cy="786384"/>
+          </a:xfrm>
+          <a:prstGeom prst="rect">
+            <a:avLst/>
+          </a:prstGeom>
+          <a:solidFill>
+            <a:srgbClr val="2F5D8A"/>
+          </a:solidFill>
+          <a:ln/>
+        </p:spPr>
+      </p:sp>
+      <p:sp>
+        <p:nvSpPr>
+          <p:cNvPr id="12" name="Layer 1 name"/>
+          <p:cNvSpPr/>
+          <p:nvPr/>
+        </p:nvSpPr>
+        <p:spPr>
+          <a:xfrm>
+            <a:off x="731520" y="2240280"/>
+            <a:ext cx="2688336" cy="256032"/>
+          </a:xfrm>
+          <a:prstGeom prst="rect">
+            <a:avLst/>
+          </a:prstGeom>
+          <a:noFill/>
+          <a:ln/>
+        </p:spPr>
+        <p:txBody>
+          <a:bodyPr wrap="square" lIns="0" tIns="0" rIns="0" bIns="0" rtlCol="0" anchor="t"/>
+          <a:lstStyle/>
+          <a:p>
+            <a:pPr algn="l" indent="0" marL="0">
+              <a:buNone/>
+            </a:pPr>
+            <a:r>
+              <a:rPr lang="en-US" sz="1600" b="1" dirty="0">
+                <a:solidFill>
+                  <a:srgbClr val="1F2328"/>
+                </a:solidFill>
+                <a:latin typeface="Arial" pitchFamily="34" charset="0"/>
+                <a:ea typeface="Arial" pitchFamily="34" charset="-122"/>
+                <a:cs typeface="Arial" pitchFamily="34" charset="-120"/>
+              </a:rPr>
+              <a:t>Community apps</a:t>
+            </a:r>
+            <a:endParaRPr lang="en-US" sz="1600" dirty="0"/>
+          </a:p>
+        </p:txBody>
+      </p:sp>
+      <p:sp>
+        <p:nvSpPr>
+          <p:cNvPr id="13" name="Layer 1 text"/>
+          <p:cNvSpPr/>
+          <p:nvPr/>
+        </p:nvSpPr>
+        <p:spPr>
+          <a:xfrm>
+            <a:off x="731520" y="2505456"/>
+            <a:ext cx="2688336" cy="420624"/>
+          </a:xfrm>
+          <a:prstGeom prst="rect">
+            <a:avLst/>
+          </a:prstGeom>
+          <a:noFill/>
+          <a:ln/>
+        </p:spPr>
+        <p:txBody>
+          <a:bodyPr wrap="square" lIns="0" tIns="0" rIns="0" bIns="0" rtlCol="0" anchor="t"/>
+          <a:lstStyle/>
+          <a:p>
+            <a:pPr algn="l" indent="0" marL="0">
+              <a:lnSpc>
+                <a:spcPct val="95000"/>
+              </a:lnSpc>
+              <a:buNone/>
+            </a:pPr>
+            <a:r>
+              <a:rPr lang="en-US" sz="1400" dirty="0">
+                <a:solidFill>
+                  <a:srgbClr val="1F2328"/>
+                </a:solidFill>
+                <a:latin typeface="Arial" pitchFamily="34" charset="0"/>
+                <a:ea typeface="Arial" pitchFamily="34" charset="-122"/>
+                <a:cs typeface="Arial" pitchFamily="34" charset="-120"/>
+              </a:rPr>
+              <a:t>Reusable cFS apps, open source and NASA maintained</a:t>
+            </a:r>
+            <a:endParaRPr lang="en-US" sz="1400" dirty="0"/>
+          </a:p>
+        </p:txBody>
+      </p:sp>
+      <p:sp>
+        <p:nvSpPr>
+          <p:cNvPr id="14" name="Layer 2 fill"/>
+          <p:cNvSpPr/>
+          <p:nvPr/>
+        </p:nvSpPr>
+        <p:spPr>
+          <a:xfrm>
+            <a:off x="3602736" y="2176272"/>
+            <a:ext cx="3072384" cy="786384"/>
+          </a:xfrm>
+          <a:prstGeom prst="rect">
+            <a:avLst/>
+          </a:prstGeom>
+          <a:solidFill>
+            <a:srgbClr val="FBE4D2"/>
+          </a:solidFill>
+          <a:ln/>
+        </p:spPr>
+      </p:sp>
+      <p:sp>
+        <p:nvSpPr>
+          <p:cNvPr id="15" name="Layer 2 edge"/>
+          <p:cNvSpPr/>
+          <p:nvPr/>
+        </p:nvSpPr>
+        <p:spPr>
+          <a:xfrm>
+            <a:off x="3602736" y="2176272"/>
+            <a:ext cx="91440" cy="786384"/>
+          </a:xfrm>
+          <a:prstGeom prst="rect">
+            <a:avLst/>
+          </a:prstGeom>
+          <a:solidFill>
+            <a:srgbClr val="B85F1E"/>
+          </a:solidFill>
+          <a:ln/>
+        </p:spPr>
+      </p:sp>
+      <p:sp>
+        <p:nvSpPr>
+          <p:cNvPr id="16" name="Layer 2 name"/>
+          <p:cNvSpPr/>
+          <p:nvPr/>
+        </p:nvSpPr>
+        <p:spPr>
+          <a:xfrm>
+            <a:off x="3877056" y="2240280"/>
+            <a:ext cx="2688336" cy="256032"/>
+          </a:xfrm>
+          <a:prstGeom prst="rect">
+            <a:avLst/>
+          </a:prstGeom>
+          <a:noFill/>
+          <a:ln/>
+        </p:spPr>
+        <p:txBody>
+          <a:bodyPr wrap="square" lIns="0" tIns="0" rIns="0" bIns="0" rtlCol="0" anchor="t"/>
+          <a:lstStyle/>
+          <a:p>
+            <a:pPr algn="l" indent="0" marL="0">
+              <a:buNone/>
+            </a:pPr>
+            <a:r>
+              <a:rPr lang="en-US" sz="1600" b="1" dirty="0">
+                <a:solidFill>
+                  <a:srgbClr val="1F2328"/>
+                </a:solidFill>
+                <a:latin typeface="Arial" pitchFamily="34" charset="0"/>
+                <a:ea typeface="Arial" pitchFamily="34" charset="-122"/>
+                <a:cs typeface="Arial" pitchFamily="34" charset="-120"/>
+              </a:rPr>
+              <a:t>Mission apps</a:t>
+            </a:r>
+            <a:endParaRPr lang="en-US" sz="1600" dirty="0"/>
+          </a:p>
+        </p:txBody>
+      </p:sp>
+      <p:sp>
+        <p:nvSpPr>
+          <p:cNvPr id="17" name="Layer 2 text"/>
+          <p:cNvSpPr/>
+          <p:nvPr/>
+        </p:nvSpPr>
+        <p:spPr>
+          <a:xfrm>
+            <a:off x="3877056" y="2505456"/>
+            <a:ext cx="2688336" cy="420624"/>
+          </a:xfrm>
+          <a:prstGeom prst="rect">
+            <a:avLst/>
+          </a:prstGeom>
+          <a:noFill/>
+          <a:ln/>
+        </p:spPr>
+        <p:txBody>
+          <a:bodyPr wrap="square" lIns="0" tIns="0" rIns="0" bIns="0" rtlCol="0" anchor="t"/>
+          <a:lstStyle/>
+          <a:p>
+            <a:pPr algn="l" indent="0" marL="0">
+              <a:lnSpc>
+                <a:spcPct val="95000"/>
+              </a:lnSpc>
+              <a:buNone/>
+            </a:pPr>
+            <a:r>
+              <a:rPr lang="en-US" sz="1400" dirty="0">
+                <a:solidFill>
+                  <a:srgbClr val="1F2328"/>
+                </a:solidFill>
+                <a:latin typeface="Arial" pitchFamily="34" charset="0"/>
+                <a:ea typeface="Arial" pitchFamily="34" charset="-122"/>
+                <a:cs typeface="Arial" pitchFamily="34" charset="-120"/>
+              </a:rPr>
+              <a:t>Mission-specific apps, built by the mission team</a:t>
+            </a:r>
+            <a:endParaRPr lang="en-US" sz="1400" dirty="0"/>
+          </a:p>
+        </p:txBody>
+      </p:sp>
+      <p:sp>
+        <p:nvSpPr>
+          <p:cNvPr id="18" name="API bar 1"/>
+          <p:cNvSpPr/>
+          <p:nvPr/>
+        </p:nvSpPr>
+        <p:spPr>
+          <a:xfrm>
+            <a:off x="457200" y="3008376"/>
+            <a:ext cx="6217920" cy="256032"/>
+          </a:xfrm>
+          <a:prstGeom prst="rect">
+            <a:avLst/>
+          </a:prstGeom>
+          <a:solidFill>
+            <a:srgbClr val="2F5D8A"/>
+          </a:solidFill>
+          <a:ln/>
+        </p:spPr>
+        <p:txBody>
+          <a:bodyPr wrap="square" lIns="38100" tIns="25400" rIns="38100" bIns="25400" rtlCol="0" anchor="ctr"/>
           <a:lstStyle/>
           <a:p>
             <a:pPr algn="ctr" indent="0" marL="0">
               <a:buNone/>
             </a:pPr>
             <a:r>
-              <a:rPr lang="en-US" sz="6600" b="1" dirty="0">
-                <a:solidFill>
-                  <a:srgbClr val="1F3B57"/>
-                </a:solidFill>
-                <a:latin typeface="Arial" pitchFamily="34" charset="0"/>
-                <a:ea typeface="Arial" pitchFamily="34" charset="-122"/>
-                <a:cs typeface="Arial" pitchFamily="34" charset="-120"/>
-              </a:rPr>
-              <a:t>PLACEHOLDER</a:t>
-            </a:r>
-            <a:endParaRPr lang="en-US" sz="6600" dirty="0"/>
-          </a:p>
-        </p:txBody>
-      </p:sp>
-      <p:sp>
-        <p:nvSpPr>
-          <p:cNvPr id="3" name="Text 1"/>
-          <p:cNvSpPr/>
-          <p:nvPr/>
-        </p:nvSpPr>
-        <p:spPr>
-          <a:xfrm>
-            <a:off x="457200" y="3657600"/>
-            <a:ext cx="11274552" cy="548640"/>
+              <a:rPr lang="en-US" sz="1200" b="1" dirty="0">
+                <a:solidFill>
+                  <a:srgbClr val="FFFFFF"/>
+                </a:solidFill>
+                <a:latin typeface="Arial" pitchFamily="34" charset="0"/>
+                <a:ea typeface="Arial" pitchFamily="34" charset="-122"/>
+                <a:cs typeface="Arial" pitchFamily="34" charset="-120"/>
+              </a:rPr>
+              <a:t>standard API</a:t>
+            </a:r>
+            <a:endParaRPr lang="en-US" sz="1200" dirty="0"/>
+          </a:p>
+        </p:txBody>
+      </p:sp>
+      <p:sp>
+        <p:nvSpPr>
+          <p:cNvPr id="19" name="Layer 3 fill"/>
+          <p:cNvSpPr/>
+          <p:nvPr/>
+        </p:nvSpPr>
+        <p:spPr>
+          <a:xfrm>
+            <a:off x="457200" y="3310128"/>
+            <a:ext cx="6217920" cy="786384"/>
+          </a:xfrm>
+          <a:prstGeom prst="rect">
+            <a:avLst/>
+          </a:prstGeom>
+          <a:solidFill>
+            <a:srgbClr val="DCE6F0"/>
+          </a:solidFill>
+          <a:ln/>
+        </p:spPr>
+      </p:sp>
+      <p:sp>
+        <p:nvSpPr>
+          <p:cNvPr id="20" name="Layer 3 edge"/>
+          <p:cNvSpPr/>
+          <p:nvPr/>
+        </p:nvSpPr>
+        <p:spPr>
+          <a:xfrm>
+            <a:off x="457200" y="3310128"/>
+            <a:ext cx="91440" cy="786384"/>
+          </a:xfrm>
+          <a:prstGeom prst="rect">
+            <a:avLst/>
+          </a:prstGeom>
+          <a:solidFill>
+            <a:srgbClr val="2F5D8A"/>
+          </a:solidFill>
+          <a:ln/>
+        </p:spPr>
+      </p:sp>
+      <p:sp>
+        <p:nvSpPr>
+          <p:cNvPr id="21" name="Layer 3 name"/>
+          <p:cNvSpPr/>
+          <p:nvPr/>
+        </p:nvSpPr>
+        <p:spPr>
+          <a:xfrm>
+            <a:off x="731520" y="3374136"/>
+            <a:ext cx="5833872" cy="256032"/>
           </a:xfrm>
           <a:prstGeom prst="rect">
             <a:avLst/>
@@ -932,24 +1489,959 @@
           <a:ln/>
         </p:spPr>
         <p:txBody>
-          <a:bodyPr wrap="square" rtlCol="0" anchor="ctr"/>
+          <a:bodyPr wrap="square" lIns="0" tIns="0" rIns="0" bIns="0" rtlCol="0" anchor="t"/>
+          <a:lstStyle/>
+          <a:p>
+            <a:pPr algn="l" indent="0" marL="0">
+              <a:buNone/>
+            </a:pPr>
+            <a:r>
+              <a:rPr lang="en-US" sz="1600" b="1" dirty="0">
+                <a:solidFill>
+                  <a:srgbClr val="1F2328"/>
+                </a:solidFill>
+                <a:latin typeface="Arial" pitchFamily="34" charset="0"/>
+                <a:ea typeface="Arial" pitchFamily="34" charset="-122"/>
+                <a:cs typeface="Arial" pitchFamily="34" charset="-120"/>
+              </a:rPr>
+              <a:t>Framework services (cFE)</a:t>
+            </a:r>
+            <a:endParaRPr lang="en-US" sz="1600" dirty="0"/>
+          </a:p>
+        </p:txBody>
+      </p:sp>
+      <p:sp>
+        <p:nvSpPr>
+          <p:cNvPr id="22" name="Layer 3 text"/>
+          <p:cNvSpPr/>
+          <p:nvPr/>
+        </p:nvSpPr>
+        <p:spPr>
+          <a:xfrm>
+            <a:off x="731520" y="3639312"/>
+            <a:ext cx="5833872" cy="420624"/>
+          </a:xfrm>
+          <a:prstGeom prst="rect">
+            <a:avLst/>
+          </a:prstGeom>
+          <a:noFill/>
+          <a:ln/>
+        </p:spPr>
+        <p:txBody>
+          <a:bodyPr wrap="square" lIns="0" tIns="0" rIns="0" bIns="0" rtlCol="0" anchor="t"/>
+          <a:lstStyle/>
+          <a:p>
+            <a:pPr algn="l" indent="0" marL="0">
+              <a:lnSpc>
+                <a:spcPct val="95000"/>
+              </a:lnSpc>
+              <a:buNone/>
+            </a:pPr>
+            <a:r>
+              <a:rPr lang="en-US" sz="1400" dirty="0">
+                <a:solidFill>
+                  <a:srgbClr val="1F2328"/>
+                </a:solidFill>
+                <a:latin typeface="Arial" pitchFamily="34" charset="0"/>
+                <a:ea typeface="Arial" pitchFamily="34" charset="-122"/>
+                <a:cs typeface="Arial" pitchFamily="34" charset="-120"/>
+              </a:rPr>
+              <a:t>Executive, software bus, events, time and tables: services common to most flight apps</a:t>
+            </a:r>
+            <a:endParaRPr lang="en-US" sz="1400" dirty="0"/>
+          </a:p>
+        </p:txBody>
+      </p:sp>
+      <p:sp>
+        <p:nvSpPr>
+          <p:cNvPr id="23" name="API bar 2"/>
+          <p:cNvSpPr/>
+          <p:nvPr/>
+        </p:nvSpPr>
+        <p:spPr>
+          <a:xfrm>
+            <a:off x="457200" y="4142232"/>
+            <a:ext cx="6217920" cy="256032"/>
+          </a:xfrm>
+          <a:prstGeom prst="rect">
+            <a:avLst/>
+          </a:prstGeom>
+          <a:solidFill>
+            <a:srgbClr val="2F5D8A"/>
+          </a:solidFill>
+          <a:ln/>
+        </p:spPr>
+        <p:txBody>
+          <a:bodyPr wrap="square" lIns="38100" tIns="25400" rIns="38100" bIns="25400" rtlCol="0" anchor="ctr"/>
           <a:lstStyle/>
           <a:p>
             <a:pPr algn="ctr" indent="0" marL="0">
               <a:buNone/>
             </a:pPr>
             <a:r>
-              <a:rPr lang="en-US" sz="1800" dirty="0">
-                <a:solidFill>
-                  <a:srgbClr val="1F3B57"/>
-                </a:solidFill>
-                <a:latin typeface="Arial" pitchFamily="34" charset="0"/>
-                <a:ea typeface="Arial" pitchFamily="34" charset="-122"/>
-                <a:cs typeface="Arial" pitchFamily="34" charset="-120"/>
-              </a:rPr>
-              <a:t>architecture-three-ways/slides/01-layers/exec.pptx</a:t>
-            </a:r>
-            <a:endParaRPr lang="en-US" sz="1800" dirty="0"/>
+              <a:rPr lang="en-US" sz="1200" b="1" dirty="0">
+                <a:solidFill>
+                  <a:srgbClr val="FFFFFF"/>
+                </a:solidFill>
+                <a:latin typeface="Arial" pitchFamily="34" charset="0"/>
+                <a:ea typeface="Arial" pitchFamily="34" charset="-122"/>
+                <a:cs typeface="Arial" pitchFamily="34" charset="-120"/>
+              </a:rPr>
+              <a:t>standard API</a:t>
+            </a:r>
+            <a:endParaRPr lang="en-US" sz="1200" dirty="0"/>
+          </a:p>
+        </p:txBody>
+      </p:sp>
+      <p:sp>
+        <p:nvSpPr>
+          <p:cNvPr id="24" name="Layer 4 fill"/>
+          <p:cNvSpPr/>
+          <p:nvPr/>
+        </p:nvSpPr>
+        <p:spPr>
+          <a:xfrm>
+            <a:off x="457200" y="4443984"/>
+            <a:ext cx="3072384" cy="786384"/>
+          </a:xfrm>
+          <a:prstGeom prst="rect">
+            <a:avLst/>
+          </a:prstGeom>
+          <a:solidFill>
+            <a:srgbClr val="DCE6F0"/>
+          </a:solidFill>
+          <a:ln/>
+        </p:spPr>
+      </p:sp>
+      <p:sp>
+        <p:nvSpPr>
+          <p:cNvPr id="25" name="Layer 4 edge"/>
+          <p:cNvSpPr/>
+          <p:nvPr/>
+        </p:nvSpPr>
+        <p:spPr>
+          <a:xfrm>
+            <a:off x="457200" y="4443984"/>
+            <a:ext cx="91440" cy="786384"/>
+          </a:xfrm>
+          <a:prstGeom prst="rect">
+            <a:avLst/>
+          </a:prstGeom>
+          <a:solidFill>
+            <a:srgbClr val="2F5D8A"/>
+          </a:solidFill>
+          <a:ln/>
+        </p:spPr>
+      </p:sp>
+      <p:sp>
+        <p:nvSpPr>
+          <p:cNvPr id="26" name="Layer 4 name"/>
+          <p:cNvSpPr/>
+          <p:nvPr/>
+        </p:nvSpPr>
+        <p:spPr>
+          <a:xfrm>
+            <a:off x="731520" y="4507992"/>
+            <a:ext cx="2688336" cy="256032"/>
+          </a:xfrm>
+          <a:prstGeom prst="rect">
+            <a:avLst/>
+          </a:prstGeom>
+          <a:noFill/>
+          <a:ln/>
+        </p:spPr>
+        <p:txBody>
+          <a:bodyPr wrap="square" lIns="0" tIns="0" rIns="0" bIns="0" rtlCol="0" anchor="t"/>
+          <a:lstStyle/>
+          <a:p>
+            <a:pPr algn="l" indent="0" marL="0">
+              <a:buNone/>
+            </a:pPr>
+            <a:r>
+              <a:rPr lang="en-US" sz="1600" b="1" dirty="0">
+                <a:solidFill>
+                  <a:srgbClr val="1F2328"/>
+                </a:solidFill>
+                <a:latin typeface="Arial" pitchFamily="34" charset="0"/>
+                <a:ea typeface="Arial" pitchFamily="34" charset="-122"/>
+                <a:cs typeface="Arial" pitchFamily="34" charset="-120"/>
+              </a:rPr>
+              <a:t>OS abstraction (OSAL)</a:t>
+            </a:r>
+            <a:endParaRPr lang="en-US" sz="1600" dirty="0"/>
+          </a:p>
+        </p:txBody>
+      </p:sp>
+      <p:sp>
+        <p:nvSpPr>
+          <p:cNvPr id="27" name="Layer 4 text"/>
+          <p:cNvSpPr/>
+          <p:nvPr/>
+        </p:nvSpPr>
+        <p:spPr>
+          <a:xfrm>
+            <a:off x="731520" y="4773168"/>
+            <a:ext cx="2688336" cy="420624"/>
+          </a:xfrm>
+          <a:prstGeom prst="rect">
+            <a:avLst/>
+          </a:prstGeom>
+          <a:noFill/>
+          <a:ln/>
+        </p:spPr>
+        <p:txBody>
+          <a:bodyPr wrap="square" lIns="0" tIns="0" rIns="0" bIns="0" rtlCol="0" anchor="t"/>
+          <a:lstStyle/>
+          <a:p>
+            <a:pPr algn="l" indent="0" marL="0">
+              <a:lnSpc>
+                <a:spcPct val="95000"/>
+              </a:lnSpc>
+              <a:buNone/>
+            </a:pPr>
+            <a:r>
+              <a:rPr lang="en-US" sz="1400" dirty="0">
+                <a:solidFill>
+                  <a:srgbClr val="1F2328"/>
+                </a:solidFill>
+                <a:latin typeface="Arial" pitchFamily="34" charset="0"/>
+                <a:ea typeface="Arial" pitchFamily="34" charset="-122"/>
+                <a:cs typeface="Arial" pitchFamily="34" charset="-120"/>
+              </a:rPr>
+              <a:t>One API to the framework, whatever the real-time OS</a:t>
+            </a:r>
+            <a:endParaRPr lang="en-US" sz="1400" dirty="0"/>
+          </a:p>
+        </p:txBody>
+      </p:sp>
+      <p:sp>
+        <p:nvSpPr>
+          <p:cNvPr id="28" name="Layer 5 fill"/>
+          <p:cNvSpPr/>
+          <p:nvPr/>
+        </p:nvSpPr>
+        <p:spPr>
+          <a:xfrm>
+            <a:off x="3602736" y="4443984"/>
+            <a:ext cx="3072384" cy="786384"/>
+          </a:xfrm>
+          <a:prstGeom prst="rect">
+            <a:avLst/>
+          </a:prstGeom>
+          <a:solidFill>
+            <a:srgbClr val="FBE4D2"/>
+          </a:solidFill>
+          <a:ln/>
+        </p:spPr>
+      </p:sp>
+      <p:sp>
+        <p:nvSpPr>
+          <p:cNvPr id="29" name="Layer 5 edge"/>
+          <p:cNvSpPr/>
+          <p:nvPr/>
+        </p:nvSpPr>
+        <p:spPr>
+          <a:xfrm>
+            <a:off x="3602736" y="4443984"/>
+            <a:ext cx="91440" cy="786384"/>
+          </a:xfrm>
+          <a:prstGeom prst="rect">
+            <a:avLst/>
+          </a:prstGeom>
+          <a:solidFill>
+            <a:srgbClr val="B85F1E"/>
+          </a:solidFill>
+          <a:ln/>
+        </p:spPr>
+      </p:sp>
+      <p:sp>
+        <p:nvSpPr>
+          <p:cNvPr id="30" name="Layer 5 name"/>
+          <p:cNvSpPr/>
+          <p:nvPr/>
+        </p:nvSpPr>
+        <p:spPr>
+          <a:xfrm>
+            <a:off x="3877056" y="4507992"/>
+            <a:ext cx="2688336" cy="256032"/>
+          </a:xfrm>
+          <a:prstGeom prst="rect">
+            <a:avLst/>
+          </a:prstGeom>
+          <a:noFill/>
+          <a:ln/>
+        </p:spPr>
+        <p:txBody>
+          <a:bodyPr wrap="square" lIns="0" tIns="0" rIns="0" bIns="0" rtlCol="0" anchor="t"/>
+          <a:lstStyle/>
+          <a:p>
+            <a:pPr algn="l" indent="0" marL="0">
+              <a:buNone/>
+            </a:pPr>
+            <a:r>
+              <a:rPr lang="en-US" sz="1600" b="1" dirty="0">
+                <a:solidFill>
+                  <a:srgbClr val="1F2328"/>
+                </a:solidFill>
+                <a:latin typeface="Arial" pitchFamily="34" charset="0"/>
+                <a:ea typeface="Arial" pitchFamily="34" charset="-122"/>
+                <a:cs typeface="Arial" pitchFamily="34" charset="-120"/>
+              </a:rPr>
+              <a:t>Platform support (PSP)</a:t>
+            </a:r>
+            <a:endParaRPr lang="en-US" sz="1600" dirty="0"/>
+          </a:p>
+        </p:txBody>
+      </p:sp>
+      <p:sp>
+        <p:nvSpPr>
+          <p:cNvPr id="31" name="Layer 5 text"/>
+          <p:cNvSpPr/>
+          <p:nvPr/>
+        </p:nvSpPr>
+        <p:spPr>
+          <a:xfrm>
+            <a:off x="3877056" y="4773168"/>
+            <a:ext cx="2688336" cy="420624"/>
+          </a:xfrm>
+          <a:prstGeom prst="rect">
+            <a:avLst/>
+          </a:prstGeom>
+          <a:noFill/>
+          <a:ln/>
+        </p:spPr>
+        <p:txBody>
+          <a:bodyPr wrap="square" lIns="0" tIns="0" rIns="0" bIns="0" rtlCol="0" anchor="t"/>
+          <a:lstStyle/>
+          <a:p>
+            <a:pPr algn="l" indent="0" marL="0">
+              <a:lnSpc>
+                <a:spcPct val="95000"/>
+              </a:lnSpc>
+              <a:buNone/>
+            </a:pPr>
+            <a:r>
+              <a:rPr lang="en-US" sz="1400" dirty="0">
+                <a:solidFill>
+                  <a:srgbClr val="1F2328"/>
+                </a:solidFill>
+                <a:latin typeface="Arial" pitchFamily="34" charset="0"/>
+                <a:ea typeface="Arial" pitchFamily="34" charset="-122"/>
+                <a:cs typeface="Arial" pitchFamily="34" charset="-120"/>
+              </a:rPr>
+              <a:t>Standard API, with platform packages a mission often builds</a:t>
+            </a:r>
+            <a:endParaRPr lang="en-US" sz="1400" dirty="0"/>
+          </a:p>
+        </p:txBody>
+      </p:sp>
+      <p:sp>
+        <p:nvSpPr>
+          <p:cNvPr id="32" name="Base strip RTOS"/>
+          <p:cNvSpPr/>
+          <p:nvPr/>
+        </p:nvSpPr>
+        <p:spPr>
+          <a:xfrm>
+            <a:off x="457200" y="5276088"/>
+            <a:ext cx="2377440" cy="274320"/>
+          </a:xfrm>
+          <a:prstGeom prst="rect">
+            <a:avLst/>
+          </a:prstGeom>
+          <a:solidFill>
+            <a:srgbClr val="E4E7EB"/>
+          </a:solidFill>
+          <a:ln/>
+        </p:spPr>
+        <p:txBody>
+          <a:bodyPr wrap="square" lIns="38100" tIns="25400" rIns="38100" bIns="25400" rtlCol="0" anchor="ctr"/>
+          <a:lstStyle/>
+          <a:p>
+            <a:pPr algn="ctr" indent="0" marL="0">
+              <a:buNone/>
+            </a:pPr>
+            <a:r>
+              <a:rPr lang="en-US" sz="1200" dirty="0">
+                <a:solidFill>
+                  <a:srgbClr val="1F2328"/>
+                </a:solidFill>
+                <a:latin typeface="Arial" pitchFamily="34" charset="0"/>
+                <a:ea typeface="Arial" pitchFamily="34" charset="-122"/>
+                <a:cs typeface="Arial" pitchFamily="34" charset="-120"/>
+              </a:rPr>
+              <a:t>Real-time OS (third party)</a:t>
+            </a:r>
+            <a:endParaRPr lang="en-US" sz="1200" dirty="0"/>
+          </a:p>
+        </p:txBody>
+      </p:sp>
+      <p:sp>
+        <p:nvSpPr>
+          <p:cNvPr id="33" name="Base strip boot"/>
+          <p:cNvSpPr/>
+          <p:nvPr/>
+        </p:nvSpPr>
+        <p:spPr>
+          <a:xfrm>
+            <a:off x="2907792" y="5276088"/>
+            <a:ext cx="3767328" cy="274320"/>
+          </a:xfrm>
+          <a:prstGeom prst="rect">
+            <a:avLst/>
+          </a:prstGeom>
+          <a:solidFill>
+            <a:srgbClr val="FBE4D2"/>
+          </a:solidFill>
+          <a:ln/>
+        </p:spPr>
+        <p:txBody>
+          <a:bodyPr wrap="square" lIns="38100" tIns="25400" rIns="38100" bIns="25400" rtlCol="0" anchor="ctr"/>
+          <a:lstStyle/>
+          <a:p>
+            <a:pPr algn="ctr" indent="0" marL="0">
+              <a:buNone/>
+            </a:pPr>
+            <a:r>
+              <a:rPr lang="en-US" sz="1200" dirty="0">
+                <a:solidFill>
+                  <a:srgbClr val="1F2328"/>
+                </a:solidFill>
+                <a:latin typeface="Arial" pitchFamily="34" charset="0"/>
+                <a:ea typeface="Arial" pitchFamily="34" charset="-122"/>
+                <a:cs typeface="Arial" pitchFamily="34" charset="-120"/>
+              </a:rPr>
+              <a:t>Board support and boot code (mission built)</a:t>
+            </a:r>
+            <a:endParaRPr lang="en-US" sz="1200" dirty="0"/>
+          </a:p>
+        </p:txBody>
+      </p:sp>
+      <p:sp>
+        <p:nvSpPr>
+          <p:cNvPr id="34" name="Benefits heading"/>
+          <p:cNvSpPr/>
+          <p:nvPr/>
+        </p:nvSpPr>
+        <p:spPr>
+          <a:xfrm>
+            <a:off x="6995160" y="1847088"/>
+            <a:ext cx="4736592" cy="274320"/>
+          </a:xfrm>
+          <a:prstGeom prst="rect">
+            <a:avLst/>
+          </a:prstGeom>
+          <a:noFill/>
+          <a:ln/>
+        </p:spPr>
+        <p:txBody>
+          <a:bodyPr wrap="square" lIns="0" tIns="0" rIns="0" bIns="0" rtlCol="0" anchor="t"/>
+          <a:lstStyle/>
+          <a:p>
+            <a:pPr algn="l" indent="0" marL="0">
+              <a:buNone/>
+            </a:pPr>
+            <a:r>
+              <a:rPr lang="en-US" sz="1500" b="1" dirty="0">
+                <a:solidFill>
+                  <a:srgbClr val="1F2328"/>
+                </a:solidFill>
+                <a:latin typeface="Arial" pitchFamily="34" charset="0"/>
+                <a:ea typeface="Arial" pitchFamily="34" charset="-122"/>
+                <a:cs typeface="Arial" pitchFamily="34" charset="-120"/>
+              </a:rPr>
+              <a:t>What NASA says the layers give a mission</a:t>
+            </a:r>
+            <a:endParaRPr lang="en-US" sz="1500" dirty="0"/>
+          </a:p>
+        </p:txBody>
+      </p:sp>
+      <p:sp>
+        <p:nvSpPr>
+          <p:cNvPr id="35" name="Benefit 1 rule"/>
+          <p:cNvSpPr/>
+          <p:nvPr/>
+        </p:nvSpPr>
+        <p:spPr>
+          <a:xfrm>
+            <a:off x="6995160" y="2176272"/>
+            <a:ext cx="54864" cy="873252"/>
+          </a:xfrm>
+          <a:prstGeom prst="rect">
+            <a:avLst/>
+          </a:prstGeom>
+          <a:solidFill>
+            <a:srgbClr val="2F5D8A"/>
+          </a:solidFill>
+          <a:ln/>
+        </p:spPr>
+      </p:sp>
+      <p:sp>
+        <p:nvSpPr>
+          <p:cNvPr id="36" name="Benefit 1 label"/>
+          <p:cNvSpPr/>
+          <p:nvPr/>
+        </p:nvSpPr>
+        <p:spPr>
+          <a:xfrm>
+            <a:off x="7196328" y="2176272"/>
+            <a:ext cx="4535424" cy="246888"/>
+          </a:xfrm>
+          <a:prstGeom prst="rect">
+            <a:avLst/>
+          </a:prstGeom>
+          <a:noFill/>
+          <a:ln/>
+        </p:spPr>
+        <p:txBody>
+          <a:bodyPr wrap="square" lIns="0" tIns="0" rIns="0" bIns="0" rtlCol="0" anchor="t"/>
+          <a:lstStyle/>
+          <a:p>
+            <a:pPr algn="l" indent="0" marL="0">
+              <a:buNone/>
+            </a:pPr>
+            <a:r>
+              <a:rPr lang="en-US" sz="1600" b="1" dirty="0">
+                <a:solidFill>
+                  <a:srgbClr val="2F5D8A"/>
+                </a:solidFill>
+                <a:latin typeface="Arial" pitchFamily="34" charset="0"/>
+                <a:ea typeface="Arial" pitchFamily="34" charset="-122"/>
+                <a:cs typeface="Arial" pitchFamily="34" charset="-120"/>
+              </a:rPr>
+              <a:t>Reusable components</a:t>
+            </a:r>
+            <a:endParaRPr lang="en-US" sz="1600" dirty="0"/>
+          </a:p>
+        </p:txBody>
+      </p:sp>
+      <p:sp>
+        <p:nvSpPr>
+          <p:cNvPr id="37" name="Benefit 1 quote"/>
+          <p:cNvSpPr/>
+          <p:nvPr/>
+        </p:nvSpPr>
+        <p:spPr>
+          <a:xfrm>
+            <a:off x="7196328" y="2441448"/>
+            <a:ext cx="4535424" cy="434340"/>
+          </a:xfrm>
+          <a:prstGeom prst="rect">
+            <a:avLst/>
+          </a:prstGeom>
+          <a:noFill/>
+          <a:ln/>
+        </p:spPr>
+        <p:txBody>
+          <a:bodyPr wrap="square" lIns="0" tIns="0" rIns="0" bIns="0" rtlCol="0" anchor="t"/>
+          <a:lstStyle/>
+          <a:p>
+            <a:pPr algn="l" indent="0" marL="0">
+              <a:buNone/>
+            </a:pPr>
+            <a:r>
+              <a:rPr lang="en-US" sz="1400" dirty="0">
+                <a:solidFill>
+                  <a:srgbClr val="1F2328"/>
+                </a:solidFill>
+                <a:latin typeface="Arial" pitchFamily="34" charset="0"/>
+                <a:ea typeface="Arial" pitchFamily="34" charset="-122"/>
+                <a:cs typeface="Arial" pitchFamily="34" charset="-120"/>
+              </a:rPr>
+              <a:t>“Reuse of tested, certified components supplies savings in each phase of the software development cycle.”</a:t>
+            </a:r>
+            <a:endParaRPr lang="en-US" sz="1400" dirty="0"/>
+          </a:p>
+        </p:txBody>
+      </p:sp>
+      <p:sp>
+        <p:nvSpPr>
+          <p:cNvPr id="38" name="Benefit 1 cite"/>
+          <p:cNvSpPr/>
+          <p:nvPr/>
+        </p:nvSpPr>
+        <p:spPr>
+          <a:xfrm>
+            <a:off x="7196328" y="2894076"/>
+            <a:ext cx="4535424" cy="155448"/>
+          </a:xfrm>
+          <a:prstGeom prst="rect">
+            <a:avLst/>
+          </a:prstGeom>
+          <a:noFill/>
+          <a:ln/>
+        </p:spPr>
+        <p:txBody>
+          <a:bodyPr wrap="square" lIns="0" tIns="0" rIns="0" bIns="0" rtlCol="0" anchor="t"/>
+          <a:lstStyle/>
+          <a:p>
+            <a:pPr algn="l" indent="0" marL="0">
+              <a:buNone/>
+            </a:pPr>
+            <a:r>
+              <a:rPr lang="en-US" sz="1000" dirty="0">
+                <a:solidFill>
+                  <a:srgbClr val="565E69"/>
+                </a:solidFill>
+                <a:latin typeface="Arial" pitchFamily="34" charset="0"/>
+                <a:ea typeface="Arial" pitchFamily="34" charset="-122"/>
+                <a:cs typeface="Arial" pitchFamily="34" charset="-120"/>
+              </a:rPr>
+              <a:t>Feature: 2015 deck, p8. Quote: 2021 training memo, p41.</a:t>
+            </a:r>
+            <a:endParaRPr lang="en-US" sz="1000" dirty="0"/>
+          </a:p>
+        </p:txBody>
+      </p:sp>
+      <p:sp>
+        <p:nvSpPr>
+          <p:cNvPr id="39" name="Benefit 2 rule"/>
+          <p:cNvSpPr/>
+          <p:nvPr/>
+        </p:nvSpPr>
+        <p:spPr>
+          <a:xfrm>
+            <a:off x="6995160" y="3322701"/>
+            <a:ext cx="54864" cy="1081278"/>
+          </a:xfrm>
+          <a:prstGeom prst="rect">
+            <a:avLst/>
+          </a:prstGeom>
+          <a:solidFill>
+            <a:srgbClr val="2F5D8A"/>
+          </a:solidFill>
+          <a:ln/>
+        </p:spPr>
+      </p:sp>
+      <p:sp>
+        <p:nvSpPr>
+          <p:cNvPr id="40" name="Benefit 2 label"/>
+          <p:cNvSpPr/>
+          <p:nvPr/>
+        </p:nvSpPr>
+        <p:spPr>
+          <a:xfrm>
+            <a:off x="7196328" y="3322701"/>
+            <a:ext cx="4535424" cy="246888"/>
+          </a:xfrm>
+          <a:prstGeom prst="rect">
+            <a:avLst/>
+          </a:prstGeom>
+          <a:noFill/>
+          <a:ln/>
+        </p:spPr>
+        <p:txBody>
+          <a:bodyPr wrap="square" lIns="0" tIns="0" rIns="0" bIns="0" rtlCol="0" anchor="t"/>
+          <a:lstStyle/>
+          <a:p>
+            <a:pPr algn="l" indent="0" marL="0">
+              <a:buNone/>
+            </a:pPr>
+            <a:r>
+              <a:rPr lang="en-US" sz="1600" b="1" dirty="0">
+                <a:solidFill>
+                  <a:srgbClr val="2F5D8A"/>
+                </a:solidFill>
+                <a:latin typeface="Arial" pitchFamily="34" charset="0"/>
+                <a:ea typeface="Arial" pitchFamily="34" charset="-122"/>
+                <a:cs typeface="Arial" pitchFamily="34" charset="-120"/>
+              </a:rPr>
+              <a:t>Platform independent</a:t>
+            </a:r>
+            <a:endParaRPr lang="en-US" sz="1600" dirty="0"/>
+          </a:p>
+        </p:txBody>
+      </p:sp>
+      <p:sp>
+        <p:nvSpPr>
+          <p:cNvPr id="41" name="Benefit 2 quote"/>
+          <p:cNvSpPr/>
+          <p:nvPr/>
+        </p:nvSpPr>
+        <p:spPr>
+          <a:xfrm>
+            <a:off x="7196328" y="3587877"/>
+            <a:ext cx="4535424" cy="642366"/>
+          </a:xfrm>
+          <a:prstGeom prst="rect">
+            <a:avLst/>
+          </a:prstGeom>
+          <a:noFill/>
+          <a:ln/>
+        </p:spPr>
+        <p:txBody>
+          <a:bodyPr wrap="square" lIns="0" tIns="0" rIns="0" bIns="0" rtlCol="0" anchor="t"/>
+          <a:lstStyle/>
+          <a:p>
+            <a:pPr algn="l" indent="0" marL="0">
+              <a:buNone/>
+            </a:pPr>
+            <a:r>
+              <a:rPr lang="en-US" sz="1400" dirty="0">
+                <a:solidFill>
+                  <a:srgbClr val="1F2328"/>
+                </a:solidFill>
+                <a:latin typeface="Arial" pitchFamily="34" charset="0"/>
+                <a:ea typeface="Arial" pitchFamily="34" charset="-122"/>
+                <a:cs typeface="Arial" pitchFamily="34" charset="-120"/>
+              </a:rPr>
+              <a:t>“Layered architecture and compile-time configuration parameters make it scalable and portable to a wide range of platforms”</a:t>
+            </a:r>
+            <a:endParaRPr lang="en-US" sz="1400" dirty="0"/>
+          </a:p>
+        </p:txBody>
+      </p:sp>
+      <p:sp>
+        <p:nvSpPr>
+          <p:cNvPr id="42" name="Benefit 2 cite"/>
+          <p:cNvSpPr/>
+          <p:nvPr/>
+        </p:nvSpPr>
+        <p:spPr>
+          <a:xfrm>
+            <a:off x="7196328" y="4248531"/>
+            <a:ext cx="4535424" cy="155448"/>
+          </a:xfrm>
+          <a:prstGeom prst="rect">
+            <a:avLst/>
+          </a:prstGeom>
+          <a:noFill/>
+          <a:ln/>
+        </p:spPr>
+        <p:txBody>
+          <a:bodyPr wrap="square" lIns="0" tIns="0" rIns="0" bIns="0" rtlCol="0" anchor="t"/>
+          <a:lstStyle/>
+          <a:p>
+            <a:pPr algn="l" indent="0" marL="0">
+              <a:buNone/>
+            </a:pPr>
+            <a:r>
+              <a:rPr lang="en-US" sz="1000" dirty="0">
+                <a:solidFill>
+                  <a:srgbClr val="565E69"/>
+                </a:solidFill>
+                <a:latin typeface="Arial" pitchFamily="34" charset="0"/>
+                <a:ea typeface="Arial" pitchFamily="34" charset="-122"/>
+                <a:cs typeface="Arial" pitchFamily="34" charset="-120"/>
+              </a:rPr>
+              <a:t>Feature: 2015 deck, p8. Quote: 2015 deck, p2.</a:t>
+            </a:r>
+            <a:endParaRPr lang="en-US" sz="1000" dirty="0"/>
+          </a:p>
+        </p:txBody>
+      </p:sp>
+      <p:sp>
+        <p:nvSpPr>
+          <p:cNvPr id="43" name="Benefit 3 rule"/>
+          <p:cNvSpPr/>
+          <p:nvPr/>
+        </p:nvSpPr>
+        <p:spPr>
+          <a:xfrm>
+            <a:off x="6995160" y="4677156"/>
+            <a:ext cx="54864" cy="873252"/>
+          </a:xfrm>
+          <a:prstGeom prst="rect">
+            <a:avLst/>
+          </a:prstGeom>
+          <a:solidFill>
+            <a:srgbClr val="2F5D8A"/>
+          </a:solidFill>
+          <a:ln/>
+        </p:spPr>
+      </p:sp>
+      <p:sp>
+        <p:nvSpPr>
+          <p:cNvPr id="44" name="Benefit 3 label"/>
+          <p:cNvSpPr/>
+          <p:nvPr/>
+        </p:nvSpPr>
+        <p:spPr>
+          <a:xfrm>
+            <a:off x="7196328" y="4677156"/>
+            <a:ext cx="4535424" cy="246888"/>
+          </a:xfrm>
+          <a:prstGeom prst="rect">
+            <a:avLst/>
+          </a:prstGeom>
+          <a:noFill/>
+          <a:ln/>
+        </p:spPr>
+        <p:txBody>
+          <a:bodyPr wrap="square" lIns="0" tIns="0" rIns="0" bIns="0" rtlCol="0" anchor="t"/>
+          <a:lstStyle/>
+          <a:p>
+            <a:pPr algn="l" indent="0" marL="0">
+              <a:buNone/>
+            </a:pPr>
+            <a:r>
+              <a:rPr lang="en-US" sz="1600" b="1" dirty="0">
+                <a:solidFill>
+                  <a:srgbClr val="2F5D8A"/>
+                </a:solidFill>
+                <a:latin typeface="Arial" pitchFamily="34" charset="0"/>
+                <a:ea typeface="Arial" pitchFamily="34" charset="-122"/>
+                <a:cs typeface="Arial" pitchFamily="34" charset="-120"/>
+              </a:rPr>
+              <a:t>New technology without framework changes</a:t>
+            </a:r>
+            <a:endParaRPr lang="en-US" sz="1600" dirty="0"/>
+          </a:p>
+        </p:txBody>
+      </p:sp>
+      <p:sp>
+        <p:nvSpPr>
+          <p:cNvPr id="45" name="Benefit 3 quote"/>
+          <p:cNvSpPr/>
+          <p:nvPr/>
+        </p:nvSpPr>
+        <p:spPr>
+          <a:xfrm>
+            <a:off x="7196328" y="4942332"/>
+            <a:ext cx="4535424" cy="434340"/>
+          </a:xfrm>
+          <a:prstGeom prst="rect">
+            <a:avLst/>
+          </a:prstGeom>
+          <a:noFill/>
+          <a:ln/>
+        </p:spPr>
+        <p:txBody>
+          <a:bodyPr wrap="square" lIns="0" tIns="0" rIns="0" bIns="0" rtlCol="0" anchor="t"/>
+          <a:lstStyle/>
+          <a:p>
+            <a:pPr algn="l" indent="0" marL="0">
+              <a:buNone/>
+            </a:pPr>
+            <a:r>
+              <a:rPr lang="en-US" sz="1400" dirty="0">
+                <a:solidFill>
+                  <a:srgbClr val="1F2328"/>
+                </a:solidFill>
+                <a:latin typeface="Arial" pitchFamily="34" charset="0"/>
+                <a:ea typeface="Arial" pitchFamily="34" charset="-122"/>
+                <a:cs typeface="Arial" pitchFamily="34" charset="-120"/>
+              </a:rPr>
+              <a:t>“Internals of a layer can be changed -- without affecting other layers’ internals and components.”</a:t>
+            </a:r>
+            <a:endParaRPr lang="en-US" sz="1400" dirty="0"/>
+          </a:p>
+        </p:txBody>
+      </p:sp>
+      <p:sp>
+        <p:nvSpPr>
+          <p:cNvPr id="46" name="Benefit 3 cite"/>
+          <p:cNvSpPr/>
+          <p:nvPr/>
+        </p:nvSpPr>
+        <p:spPr>
+          <a:xfrm>
+            <a:off x="7196328" y="5394960"/>
+            <a:ext cx="4535424" cy="155448"/>
+          </a:xfrm>
+          <a:prstGeom prst="rect">
+            <a:avLst/>
+          </a:prstGeom>
+          <a:noFill/>
+          <a:ln/>
+        </p:spPr>
+        <p:txBody>
+          <a:bodyPr wrap="square" lIns="0" tIns="0" rIns="0" bIns="0" rtlCol="0" anchor="t"/>
+          <a:lstStyle/>
+          <a:p>
+            <a:pPr algn="l" indent="0" marL="0">
+              <a:buNone/>
+            </a:pPr>
+            <a:r>
+              <a:rPr lang="en-US" sz="1000" dirty="0">
+                <a:solidFill>
+                  <a:srgbClr val="565E69"/>
+                </a:solidFill>
+                <a:latin typeface="Arial" pitchFamily="34" charset="0"/>
+                <a:ea typeface="Arial" pitchFamily="34" charset="-122"/>
+                <a:cs typeface="Arial" pitchFamily="34" charset="-120"/>
+              </a:rPr>
+              <a:t>Feature: 2015 deck, p8. Quote: 2023 overview, slide 8.</a:t>
+            </a:r>
+            <a:endParaRPr lang="en-US" sz="1000" dirty="0"/>
+          </a:p>
+        </p:txBody>
+      </p:sp>
+      <p:sp>
+        <p:nvSpPr>
+          <p:cNvPr id="47" name="Sources"/>
+          <p:cNvSpPr/>
+          <p:nvPr/>
+        </p:nvSpPr>
+        <p:spPr>
+          <a:xfrm>
+            <a:off x="457200" y="5687568"/>
+            <a:ext cx="11274552" cy="329184"/>
+          </a:xfrm>
+          <a:prstGeom prst="rect">
+            <a:avLst/>
+          </a:prstGeom>
+          <a:noFill/>
+          <a:ln/>
+        </p:spPr>
+        <p:txBody>
+          <a:bodyPr wrap="square" lIns="0" tIns="0" rIns="0" bIns="0" rtlCol="0" anchor="t"/>
+          <a:lstStyle/>
+          <a:p>
+            <a:pPr algn="l" indent="0" marL="0">
+              <a:buNone/>
+            </a:pPr>
+            <a:r>
+              <a:rPr lang="en-US" sz="1000" dirty="0">
+                <a:solidFill>
+                  <a:srgbClr val="565E69"/>
+                </a:solidFill>
+                <a:latin typeface="Arial" pitchFamily="34" charset="0"/>
+                <a:ea typeface="Arial" pitchFamily="34" charset="-122"/>
+                <a:cs typeface="Arial" pitchFamily="34" charset="-120"/>
+              </a:rPr>
+              <a:t>Sources: 2015 deck: McComas et al., NASA Goddard, Aug. 2015, NTRS 20150018075. 2023 overview: Baker, NASA Goddard, 2023, NTRS 20230002444. 2021 memo: NASA/TM-20205000691/REV 1, NTRS 20205011588, printed pages. Title: 2023 overview slide 8 and memo p41. Layers: memo pp. 23 to 26 and 45. Colors: 2015 legend (p8) and its note on center PSPs (p23).</a:t>
+            </a:r>
+            <a:endParaRPr lang="en-US" sz="1000" dirty="0"/>
+          </a:p>
+        </p:txBody>
+      </p:sp>
+      <p:sp>
+        <p:nvSpPr>
+          <p:cNvPr id="48" name="Footer"/>
+          <p:cNvSpPr/>
+          <p:nvPr/>
+        </p:nvSpPr>
+        <p:spPr>
+          <a:xfrm>
+            <a:off x="457200" y="6144768"/>
+            <a:ext cx="11274552" cy="201168"/>
+          </a:xfrm>
+          <a:prstGeom prst="rect">
+            <a:avLst/>
+          </a:prstGeom>
+          <a:noFill/>
+          <a:ln/>
+        </p:spPr>
+        <p:txBody>
+          <a:bodyPr wrap="square" lIns="0" tIns="0" rIns="0" bIns="0" rtlCol="0" anchor="t"/>
+          <a:lstStyle/>
+          <a:p>
+            <a:pPr algn="l" indent="0" marL="0">
+              <a:buNone/>
+            </a:pPr>
+            <a:r>
+              <a:rPr lang="en-US" sz="1000" dirty="0">
+                <a:solidFill>
+                  <a:srgbClr val="565E69"/>
+                </a:solidFill>
+                <a:latin typeface="Arial" pitchFamily="34" charset="0"/>
+                <a:ea typeface="Arial" pitchFamily="34" charset="-122"/>
+                <a:cs typeface="Arial" pitchFamily="34" charset="-120"/>
+              </a:rPr>
+              <a:t>Portfolio reconstruction of a public NASA slide. Not a NASA document.</a:t>
+            </a:r>
+            <a:endParaRPr lang="en-US" sz="1000" dirty="0"/>
           </a:p>
         </p:txBody>
       </p:sp>
